--- a/public/documents/business-simulation/round-4/section-d/section-d-round4-team-flow-map.pptx
+++ b/public/documents/business-simulation/round-4/section-d/section-d-round4-team-flow-map.pptx
@@ -7314,6 +7314,10 @@
           </p:nvPr>
         </p:nvSpPr>
         <p:spPr/>
+        <p:txBody>
+          <a:bodyPr/>
+          <a:p/>
+        </p:txBody>
       </p:sp>
       <p:sp>
         <p:nvSpPr>
@@ -7330,10 +7334,6 @@
           <a:bodyPr/>
           <a:lstStyle/>
           <a:p>
-            <a:r>
-              <a:rPr lang="en-US" dirty="0"/>
-              <a:t>Introduce the deck as a continuity map across team-name changes.</a:t>
-            </a:r>
             <a:endParaRPr lang="en-US" dirty="0"/>
           </a:p>
         </p:txBody>
@@ -7353,10 +7353,6 @@
           <a:bodyPr/>
           <a:lstStyle/>
           <a:p>
-            <a:fld id="{F7021451-1387-4CA6-816F-3879F97B5CBC}" type="slidenum">
-              <a:rPr lang="en-US"/>
-              <a:t>1</a:t>
-            </a:fld>
             <a:endParaRPr lang="en-US"/>
           </a:p>
         </p:txBody>
@@ -7402,6 +7398,10 @@
           </p:nvPr>
         </p:nvSpPr>
         <p:spPr/>
+        <p:txBody>
+          <a:bodyPr/>
+          <a:p/>
+        </p:txBody>
       </p:sp>
       <p:sp>
         <p:nvSpPr>
@@ -7418,10 +7418,6 @@
           <a:bodyPr/>
           <a:lstStyle/>
           <a:p>
-            <a:r>
-              <a:rPr lang="en-US" dirty="0"/>
-              <a:t/>
-            </a:r>
             <a:endParaRPr lang="en-US" dirty="0"/>
           </a:p>
         </p:txBody>
@@ -7441,10 +7437,6 @@
           <a:bodyPr/>
           <a:lstStyle/>
           <a:p>
-            <a:fld id="{F7021451-1387-4CA6-816F-3879F97B5CBC}" type="slidenum">
-              <a:rPr lang="en-US"/>
-              <a:t>10</a:t>
-            </a:fld>
             <a:endParaRPr lang="en-US"/>
           </a:p>
         </p:txBody>
@@ -7490,6 +7482,10 @@
           </p:nvPr>
         </p:nvSpPr>
         <p:spPr/>
+        <p:txBody>
+          <a:bodyPr/>
+          <a:p/>
+        </p:txBody>
       </p:sp>
       <p:sp>
         <p:nvSpPr>
@@ -7506,10 +7502,6 @@
           <a:bodyPr/>
           <a:lstStyle/>
           <a:p>
-            <a:r>
-              <a:rPr lang="en-US" dirty="0"/>
-              <a:t/>
-            </a:r>
             <a:endParaRPr lang="en-US" dirty="0"/>
           </a:p>
         </p:txBody>
@@ -7529,10 +7521,6 @@
           <a:bodyPr/>
           <a:lstStyle/>
           <a:p>
-            <a:fld id="{F7021451-1387-4CA6-816F-3879F97B5CBC}" type="slidenum">
-              <a:rPr lang="en-US"/>
-              <a:t>11</a:t>
-            </a:fld>
             <a:endParaRPr lang="en-US"/>
           </a:p>
         </p:txBody>
@@ -7578,6 +7566,10 @@
           </p:nvPr>
         </p:nvSpPr>
         <p:spPr/>
+        <p:txBody>
+          <a:bodyPr/>
+          <a:p/>
+        </p:txBody>
       </p:sp>
       <p:sp>
         <p:nvSpPr>
@@ -7594,10 +7586,6 @@
           <a:bodyPr/>
           <a:lstStyle/>
           <a:p>
-            <a:r>
-              <a:rPr lang="en-US" dirty="0"/>
-              <a:t/>
-            </a:r>
             <a:endParaRPr lang="en-US" dirty="0"/>
           </a:p>
         </p:txBody>
@@ -7617,10 +7605,6 @@
           <a:bodyPr/>
           <a:lstStyle/>
           <a:p>
-            <a:fld id="{F7021451-1387-4CA6-816F-3879F97B5CBC}" type="slidenum">
-              <a:rPr lang="en-US"/>
-              <a:t>12</a:t>
-            </a:fld>
             <a:endParaRPr lang="en-US"/>
           </a:p>
         </p:txBody>
@@ -7666,6 +7650,10 @@
           </p:nvPr>
         </p:nvSpPr>
         <p:spPr/>
+        <p:txBody>
+          <a:bodyPr/>
+          <a:p/>
+        </p:txBody>
       </p:sp>
       <p:sp>
         <p:nvSpPr>
@@ -7682,10 +7670,6 @@
           <a:bodyPr/>
           <a:lstStyle/>
           <a:p>
-            <a:r>
-              <a:rPr lang="en-US" dirty="0"/>
-              <a:t/>
-            </a:r>
             <a:endParaRPr lang="en-US" dirty="0"/>
           </a:p>
         </p:txBody>
@@ -7705,10 +7689,6 @@
           <a:bodyPr/>
           <a:lstStyle/>
           <a:p>
-            <a:fld id="{F7021451-1387-4CA6-816F-3879F97B5CBC}" type="slidenum">
-              <a:rPr lang="en-US"/>
-              <a:t>13</a:t>
-            </a:fld>
             <a:endParaRPr lang="en-US"/>
           </a:p>
         </p:txBody>
@@ -7754,6 +7734,10 @@
           </p:nvPr>
         </p:nvSpPr>
         <p:spPr/>
+        <p:txBody>
+          <a:bodyPr/>
+          <a:p/>
+        </p:txBody>
       </p:sp>
       <p:sp>
         <p:nvSpPr>
@@ -7770,10 +7754,6 @@
           <a:bodyPr/>
           <a:lstStyle/>
           <a:p>
-            <a:r>
-              <a:rPr lang="en-US" dirty="0"/>
-              <a:t/>
-            </a:r>
             <a:endParaRPr lang="en-US" dirty="0"/>
           </a:p>
         </p:txBody>
@@ -7793,10 +7773,6 @@
           <a:bodyPr/>
           <a:lstStyle/>
           <a:p>
-            <a:fld id="{F7021451-1387-4CA6-816F-3879F97B5CBC}" type="slidenum">
-              <a:rPr lang="en-US"/>
-              <a:t>14</a:t>
-            </a:fld>
             <a:endParaRPr lang="en-US"/>
           </a:p>
         </p:txBody>
@@ -7842,6 +7818,10 @@
           </p:nvPr>
         </p:nvSpPr>
         <p:spPr/>
+        <p:txBody>
+          <a:bodyPr/>
+          <a:p/>
+        </p:txBody>
       </p:sp>
       <p:sp>
         <p:nvSpPr>
@@ -7858,10 +7838,6 @@
           <a:bodyPr/>
           <a:lstStyle/>
           <a:p>
-            <a:r>
-              <a:rPr lang="en-US" dirty="0"/>
-              <a:t/>
-            </a:r>
             <a:endParaRPr lang="en-US" dirty="0"/>
           </a:p>
         </p:txBody>
@@ -7881,10 +7857,6 @@
           <a:bodyPr/>
           <a:lstStyle/>
           <a:p>
-            <a:fld id="{F7021451-1387-4CA6-816F-3879F97B5CBC}" type="slidenum">
-              <a:rPr lang="en-US"/>
-              <a:t>15</a:t>
-            </a:fld>
             <a:endParaRPr lang="en-US"/>
           </a:p>
         </p:txBody>
@@ -7930,6 +7902,10 @@
           </p:nvPr>
         </p:nvSpPr>
         <p:spPr/>
+        <p:txBody>
+          <a:bodyPr/>
+          <a:p/>
+        </p:txBody>
       </p:sp>
       <p:sp>
         <p:nvSpPr>
@@ -7946,10 +7922,6 @@
           <a:bodyPr/>
           <a:lstStyle/>
           <a:p>
-            <a:r>
-              <a:rPr lang="en-US" dirty="0"/>
-              <a:t/>
-            </a:r>
             <a:endParaRPr lang="en-US" dirty="0"/>
           </a:p>
         </p:txBody>
@@ -7969,10 +7941,6 @@
           <a:bodyPr/>
           <a:lstStyle/>
           <a:p>
-            <a:fld id="{F7021451-1387-4CA6-816F-3879F97B5CBC}" type="slidenum">
-              <a:rPr lang="en-US"/>
-              <a:t>2</a:t>
-            </a:fld>
             <a:endParaRPr lang="en-US"/>
           </a:p>
         </p:txBody>
@@ -8018,6 +7986,10 @@
           </p:nvPr>
         </p:nvSpPr>
         <p:spPr/>
+        <p:txBody>
+          <a:bodyPr/>
+          <a:p/>
+        </p:txBody>
       </p:sp>
       <p:sp>
         <p:nvSpPr>
@@ -8034,10 +8006,6 @@
           <a:bodyPr/>
           <a:lstStyle/>
           <a:p>
-            <a:r>
-              <a:rPr lang="en-US" dirty="0"/>
-              <a:t/>
-            </a:r>
             <a:endParaRPr lang="en-US" dirty="0"/>
           </a:p>
         </p:txBody>
@@ -8057,10 +8025,6 @@
           <a:bodyPr/>
           <a:lstStyle/>
           <a:p>
-            <a:fld id="{F7021451-1387-4CA6-816F-3879F97B5CBC}" type="slidenum">
-              <a:rPr lang="en-US"/>
-              <a:t>3</a:t>
-            </a:fld>
             <a:endParaRPr lang="en-US"/>
           </a:p>
         </p:txBody>
@@ -8106,6 +8070,10 @@
           </p:nvPr>
         </p:nvSpPr>
         <p:spPr/>
+        <p:txBody>
+          <a:bodyPr/>
+          <a:p/>
+        </p:txBody>
       </p:sp>
       <p:sp>
         <p:nvSpPr>
@@ -8122,10 +8090,6 @@
           <a:bodyPr/>
           <a:lstStyle/>
           <a:p>
-            <a:r>
-              <a:rPr lang="en-US" dirty="0"/>
-              <a:t>Use this as the main movement slide.</a:t>
-            </a:r>
             <a:endParaRPr lang="en-US" dirty="0"/>
           </a:p>
         </p:txBody>
@@ -8145,10 +8109,6 @@
           <a:bodyPr/>
           <a:lstStyle/>
           <a:p>
-            <a:fld id="{F7021451-1387-4CA6-816F-3879F97B5CBC}" type="slidenum">
-              <a:rPr lang="en-US"/>
-              <a:t>4</a:t>
-            </a:fld>
             <a:endParaRPr lang="en-US"/>
           </a:p>
         </p:txBody>
@@ -8194,6 +8154,10 @@
           </p:nvPr>
         </p:nvSpPr>
         <p:spPr/>
+        <p:txBody>
+          <a:bodyPr/>
+          <a:p/>
+        </p:txBody>
       </p:sp>
       <p:sp>
         <p:nvSpPr>
@@ -8210,10 +8174,6 @@
           <a:bodyPr/>
           <a:lstStyle/>
           <a:p>
-            <a:r>
-              <a:rPr lang="en-US" dirty="0"/>
-              <a:t>Use this as the main movement slide.</a:t>
-            </a:r>
             <a:endParaRPr lang="en-US" dirty="0"/>
           </a:p>
         </p:txBody>
@@ -8233,10 +8193,6 @@
           <a:bodyPr/>
           <a:lstStyle/>
           <a:p>
-            <a:fld id="{F7021451-1387-4CA6-816F-3879F97B5CBC}" type="slidenum">
-              <a:rPr lang="en-US"/>
-              <a:t>5</a:t>
-            </a:fld>
             <a:endParaRPr lang="en-US"/>
           </a:p>
         </p:txBody>
@@ -8282,6 +8238,10 @@
           </p:nvPr>
         </p:nvSpPr>
         <p:spPr/>
+        <p:txBody>
+          <a:bodyPr/>
+          <a:p/>
+        </p:txBody>
       </p:sp>
       <p:sp>
         <p:nvSpPr>
@@ -8298,10 +8258,6 @@
           <a:bodyPr/>
           <a:lstStyle/>
           <a:p>
-            <a:r>
-              <a:rPr lang="en-US" dirty="0"/>
-              <a:t/>
-            </a:r>
             <a:endParaRPr lang="en-US" dirty="0"/>
           </a:p>
         </p:txBody>
@@ -8321,10 +8277,6 @@
           <a:bodyPr/>
           <a:lstStyle/>
           <a:p>
-            <a:fld id="{F7021451-1387-4CA6-816F-3879F97B5CBC}" type="slidenum">
-              <a:rPr lang="en-US"/>
-              <a:t>6</a:t>
-            </a:fld>
             <a:endParaRPr lang="en-US"/>
           </a:p>
         </p:txBody>
@@ -8370,6 +8322,10 @@
           </p:nvPr>
         </p:nvSpPr>
         <p:spPr/>
+        <p:txBody>
+          <a:bodyPr/>
+          <a:p/>
+        </p:txBody>
       </p:sp>
       <p:sp>
         <p:nvSpPr>
@@ -8386,10 +8342,6 @@
           <a:bodyPr/>
           <a:lstStyle/>
           <a:p>
-            <a:r>
-              <a:rPr lang="en-US" dirty="0"/>
-              <a:t/>
-            </a:r>
             <a:endParaRPr lang="en-US" dirty="0"/>
           </a:p>
         </p:txBody>
@@ -8409,10 +8361,6 @@
           <a:bodyPr/>
           <a:lstStyle/>
           <a:p>
-            <a:fld id="{F7021451-1387-4CA6-816F-3879F97B5CBC}" type="slidenum">
-              <a:rPr lang="en-US"/>
-              <a:t>7</a:t>
-            </a:fld>
             <a:endParaRPr lang="en-US"/>
           </a:p>
         </p:txBody>
@@ -8458,6 +8406,10 @@
           </p:nvPr>
         </p:nvSpPr>
         <p:spPr/>
+        <p:txBody>
+          <a:bodyPr/>
+          <a:p/>
+        </p:txBody>
       </p:sp>
       <p:sp>
         <p:nvSpPr>
@@ -8474,10 +8426,6 @@
           <a:bodyPr/>
           <a:lstStyle/>
           <a:p>
-            <a:r>
-              <a:rPr lang="en-US" dirty="0"/>
-              <a:t/>
-            </a:r>
             <a:endParaRPr lang="en-US" dirty="0"/>
           </a:p>
         </p:txBody>
@@ -8497,10 +8445,6 @@
           <a:bodyPr/>
           <a:lstStyle/>
           <a:p>
-            <a:fld id="{F7021451-1387-4CA6-816F-3879F97B5CBC}" type="slidenum">
-              <a:rPr lang="en-US"/>
-              <a:t>8</a:t>
-            </a:fld>
             <a:endParaRPr lang="en-US"/>
           </a:p>
         </p:txBody>
@@ -8546,6 +8490,10 @@
           </p:nvPr>
         </p:nvSpPr>
         <p:spPr/>
+        <p:txBody>
+          <a:bodyPr/>
+          <a:p/>
+        </p:txBody>
       </p:sp>
       <p:sp>
         <p:nvSpPr>
@@ -8562,10 +8510,6 @@
           <a:bodyPr/>
           <a:lstStyle/>
           <a:p>
-            <a:r>
-              <a:rPr lang="en-US" dirty="0"/>
-              <a:t/>
-            </a:r>
             <a:endParaRPr lang="en-US" dirty="0"/>
           </a:p>
         </p:txBody>
@@ -8585,10 +8529,6 @@
           <a:bodyPr/>
           <a:lstStyle/>
           <a:p>
-            <a:fld id="{F7021451-1387-4CA6-816F-3879F97B5CBC}" type="slidenum">
-              <a:rPr lang="en-US"/>
-              <a:t>9</a:t>
-            </a:fld>
             <a:endParaRPr lang="en-US"/>
           </a:p>
         </p:txBody>
@@ -8961,6 +8901,10 @@
             <a:prstDash val="solid"/>
           </a:ln>
         </p:spPr>
+        <p:txBody>
+          <a:bodyPr/>
+          <a:p/>
+        </p:txBody>
       </p:sp>
       <p:sp>
         <p:nvSpPr>
@@ -9105,6 +9049,10 @@
             <a:prstDash val="solid"/>
           </a:ln>
         </p:spPr>
+        <p:txBody>
+          <a:bodyPr/>
+          <a:p/>
+        </p:txBody>
       </p:sp>
       <p:sp>
         <p:nvSpPr>
@@ -9212,6 +9160,10 @@
             <a:prstDash val="solid"/>
           </a:ln>
         </p:spPr>
+        <p:txBody>
+          <a:bodyPr/>
+          <a:p/>
+        </p:txBody>
       </p:sp>
       <p:sp>
         <p:nvSpPr>
@@ -9239,6 +9191,10 @@
             <a:prstDash val="solid"/>
           </a:ln>
         </p:spPr>
+        <p:txBody>
+          <a:bodyPr/>
+          <a:p/>
+        </p:txBody>
       </p:sp>
       <p:sp>
         <p:nvSpPr>
@@ -9305,6 +9261,10 @@
             <a:prstDash val="solid"/>
           </a:ln>
         </p:spPr>
+        <p:txBody>
+          <a:bodyPr/>
+          <a:p/>
+        </p:txBody>
       </p:sp>
       <p:sp>
         <p:nvSpPr>
@@ -9371,6 +9331,10 @@
             <a:prstDash val="solid"/>
           </a:ln>
         </p:spPr>
+        <p:txBody>
+          <a:bodyPr/>
+          <a:p/>
+        </p:txBody>
       </p:sp>
       <p:sp>
         <p:nvSpPr>
@@ -9437,6 +9401,10 @@
             <a:prstDash val="solid"/>
           </a:ln>
         </p:spPr>
+        <p:txBody>
+          <a:bodyPr/>
+          <a:p/>
+        </p:txBody>
       </p:sp>
       <p:sp>
         <p:nvSpPr>
@@ -9503,6 +9471,10 @@
             <a:prstDash val="solid"/>
           </a:ln>
         </p:spPr>
+        <p:txBody>
+          <a:bodyPr/>
+          <a:p/>
+        </p:txBody>
       </p:sp>
       <p:sp>
         <p:nvSpPr>
@@ -9569,6 +9541,10 @@
             <a:prstDash val="solid"/>
           </a:ln>
         </p:spPr>
+        <p:txBody>
+          <a:bodyPr/>
+          <a:p/>
+        </p:txBody>
       </p:sp>
       <p:sp>
         <p:nvSpPr>
@@ -9704,6 +9680,10 @@
             <a:prstDash val="solid"/>
           </a:ln>
         </p:spPr>
+        <p:txBody>
+          <a:bodyPr/>
+          <a:p/>
+        </p:txBody>
       </p:sp>
       <p:sp>
         <p:nvSpPr>
@@ -9805,6 +9785,10 @@
             <a:prstDash val="solid"/>
           </a:ln>
         </p:spPr>
+        <p:txBody>
+          <a:bodyPr/>
+          <a:p/>
+        </p:txBody>
       </p:sp>
       <p:sp>
         <p:nvSpPr>
@@ -9965,6 +9949,10 @@
             <a:prstDash val="solid"/>
           </a:ln>
         </p:spPr>
+        <p:txBody>
+          <a:bodyPr/>
+          <a:p/>
+        </p:txBody>
       </p:sp>
       <p:sp>
         <p:nvSpPr>
@@ -10119,6 +10107,10 @@
             <a:prstDash val="solid"/>
           </a:ln>
         </p:spPr>
+        <p:txBody>
+          <a:bodyPr/>
+          <a:p/>
+        </p:txBody>
       </p:sp>
       <p:sp>
         <p:nvSpPr>
@@ -10220,6 +10212,10 @@
             <a:prstDash val="solid"/>
           </a:ln>
         </p:spPr>
+        <p:txBody>
+          <a:bodyPr/>
+          <a:p/>
+        </p:txBody>
       </p:sp>
       <p:sp>
         <p:nvSpPr>
@@ -10380,6 +10376,10 @@
             <a:prstDash val="solid"/>
           </a:ln>
         </p:spPr>
+        <p:txBody>
+          <a:bodyPr/>
+          <a:p/>
+        </p:txBody>
       </p:sp>
       <p:sp>
         <p:nvSpPr>
@@ -10534,6 +10534,10 @@
             <a:prstDash val="solid"/>
           </a:ln>
         </p:spPr>
+        <p:txBody>
+          <a:bodyPr/>
+          <a:p/>
+        </p:txBody>
       </p:sp>
       <p:sp>
         <p:nvSpPr>
@@ -10635,6 +10639,10 @@
             <a:prstDash val="solid"/>
           </a:ln>
         </p:spPr>
+        <p:txBody>
+          <a:bodyPr/>
+          <a:p/>
+        </p:txBody>
       </p:sp>
       <p:sp>
         <p:nvSpPr>
@@ -13644,6 +13652,10 @@
             <a:prstDash val="solid"/>
           </a:ln>
         </p:spPr>
+        <p:txBody>
+          <a:bodyPr/>
+          <a:p/>
+        </p:txBody>
       </p:sp>
       <p:sp>
         <p:nvSpPr>
@@ -13798,6 +13810,10 @@
             <a:prstDash val="solid"/>
           </a:ln>
         </p:spPr>
+        <p:txBody>
+          <a:bodyPr/>
+          <a:p/>
+        </p:txBody>
       </p:sp>
       <p:sp>
         <p:nvSpPr>
@@ -13899,6 +13915,10 @@
             <a:prstDash val="solid"/>
           </a:ln>
         </p:spPr>
+        <p:txBody>
+          <a:bodyPr/>
+          <a:p/>
+        </p:txBody>
       </p:sp>
       <p:sp>
         <p:nvSpPr>
@@ -16908,6 +16928,10 @@
             <a:prstDash val="solid"/>
           </a:ln>
         </p:spPr>
+        <p:txBody>
+          <a:bodyPr/>
+          <a:p/>
+        </p:txBody>
       </p:sp>
       <p:sp>
         <p:nvSpPr>
@@ -17062,6 +17086,10 @@
             <a:prstDash val="solid"/>
           </a:ln>
         </p:spPr>
+        <p:txBody>
+          <a:bodyPr/>
+          <a:p/>
+        </p:txBody>
       </p:sp>
       <p:sp>
         <p:nvSpPr>
@@ -17163,6 +17191,10 @@
             <a:prstDash val="solid"/>
           </a:ln>
         </p:spPr>
+        <p:txBody>
+          <a:bodyPr/>
+          <a:p/>
+        </p:txBody>
       </p:sp>
       <p:sp>
         <p:nvSpPr>
@@ -18126,6 +18158,10 @@
             <a:prstDash val="solid"/>
           </a:ln>
         </p:spPr>
+        <p:txBody>
+          <a:bodyPr/>
+          <a:p/>
+        </p:txBody>
       </p:sp>
       <p:sp>
         <p:nvSpPr>
@@ -18280,6 +18316,10 @@
             <a:prstDash val="solid"/>
           </a:ln>
         </p:spPr>
+        <p:txBody>
+          <a:bodyPr/>
+          <a:p/>
+        </p:txBody>
       </p:sp>
       <p:sp>
         <p:nvSpPr>
@@ -18381,6 +18421,10 @@
             <a:prstDash val="solid"/>
           </a:ln>
         </p:spPr>
+        <p:txBody>
+          <a:bodyPr/>
+          <a:p/>
+        </p:txBody>
       </p:sp>
       <p:sp>
         <p:nvSpPr>
@@ -18591,6 +18635,10 @@
             <a:prstDash val="solid"/>
           </a:ln>
         </p:spPr>
+        <p:txBody>
+          <a:bodyPr/>
+          <a:p/>
+        </p:txBody>
       </p:sp>
       <p:sp>
         <p:nvSpPr>
@@ -18745,6 +18793,10 @@
             <a:prstDash val="solid"/>
           </a:ln>
         </p:spPr>
+        <p:txBody>
+          <a:bodyPr/>
+          <a:p/>
+        </p:txBody>
       </p:sp>
       <p:sp>
         <p:nvSpPr>
@@ -18846,6 +18898,10 @@
             <a:prstDash val="solid"/>
           </a:ln>
         </p:spPr>
+        <p:txBody>
+          <a:bodyPr/>
+          <a:p/>
+        </p:txBody>
       </p:sp>
       <p:sp>
         <p:nvSpPr>
@@ -21378,6 +21434,10 @@
             <a:prstDash val="solid"/>
           </a:ln>
         </p:spPr>
+        <p:txBody>
+          <a:bodyPr/>
+          <a:p/>
+        </p:txBody>
       </p:sp>
       <p:sp>
         <p:nvSpPr>
@@ -21532,6 +21592,10 @@
             <a:prstDash val="solid"/>
           </a:ln>
         </p:spPr>
+        <p:txBody>
+          <a:bodyPr/>
+          <a:p/>
+        </p:txBody>
       </p:sp>
       <p:sp>
         <p:nvSpPr>
@@ -21633,6 +21697,10 @@
             <a:prstDash val="solid"/>
           </a:ln>
         </p:spPr>
+        <p:txBody>
+          <a:bodyPr/>
+          <a:p/>
+        </p:txBody>
       </p:sp>
       <p:sp>
         <p:nvSpPr>
@@ -24165,6 +24233,10 @@
             <a:prstDash val="solid"/>
           </a:ln>
         </p:spPr>
+        <p:txBody>
+          <a:bodyPr/>
+          <a:p/>
+        </p:txBody>
       </p:sp>
       <p:sp>
         <p:nvSpPr>
@@ -24319,6 +24391,10 @@
             <a:prstDash val="solid"/>
           </a:ln>
         </p:spPr>
+        <p:txBody>
+          <a:bodyPr/>
+          <a:p/>
+        </p:txBody>
       </p:sp>
       <p:sp>
         <p:nvSpPr>
@@ -24420,6 +24496,10 @@
             <a:prstDash val="solid"/>
           </a:ln>
         </p:spPr>
+        <p:txBody>
+          <a:bodyPr/>
+          <a:p/>
+        </p:txBody>
       </p:sp>
       <p:sp>
         <p:nvSpPr>
@@ -24580,6 +24660,10 @@
             <a:prstDash val="solid"/>
           </a:ln>
         </p:spPr>
+        <p:txBody>
+          <a:bodyPr/>
+          <a:p/>
+        </p:txBody>
       </p:sp>
       <p:sp>
         <p:nvSpPr>
@@ -24734,6 +24818,10 @@
             <a:prstDash val="solid"/>
           </a:ln>
         </p:spPr>
+        <p:txBody>
+          <a:bodyPr/>
+          <a:p/>
+        </p:txBody>
       </p:sp>
       <p:sp>
         <p:nvSpPr>
@@ -24835,6 +24923,10 @@
             <a:prstDash val="solid"/>
           </a:ln>
         </p:spPr>
+        <p:txBody>
+          <a:bodyPr/>
+          <a:p/>
+        </p:txBody>
       </p:sp>
       <p:sp>
         <p:nvSpPr>
@@ -24995,6 +25087,10 @@
             <a:prstDash val="solid"/>
           </a:ln>
         </p:spPr>
+        <p:txBody>
+          <a:bodyPr/>
+          <a:p/>
+        </p:txBody>
       </p:sp>
       <p:sp>
         <p:nvSpPr>
@@ -25149,6 +25245,10 @@
             <a:prstDash val="solid"/>
           </a:ln>
         </p:spPr>
+        <p:txBody>
+          <a:bodyPr/>
+          <a:p/>
+        </p:txBody>
       </p:sp>
       <p:sp>
         <p:nvSpPr>
@@ -25250,6 +25350,10 @@
             <a:prstDash val="solid"/>
           </a:ln>
         </p:spPr>
+        <p:txBody>
+          <a:bodyPr/>
+          <a:p/>
+        </p:txBody>
       </p:sp>
       <p:sp>
         <p:nvSpPr>
@@ -25410,6 +25514,10 @@
             <a:prstDash val="solid"/>
           </a:ln>
         </p:spPr>
+        <p:txBody>
+          <a:bodyPr/>
+          <a:p/>
+        </p:txBody>
       </p:sp>
       <p:sp>
         <p:nvSpPr>
@@ -25564,6 +25672,10 @@
             <a:prstDash val="solid"/>
           </a:ln>
         </p:spPr>
+        <p:txBody>
+          <a:bodyPr/>
+          <a:p/>
+        </p:txBody>
       </p:sp>
       <p:sp>
         <p:nvSpPr>
@@ -25665,6 +25777,10 @@
             <a:prstDash val="solid"/>
           </a:ln>
         </p:spPr>
+        <p:txBody>
+          <a:bodyPr/>
+          <a:p/>
+        </p:txBody>
       </p:sp>
       <p:sp>
         <p:nvSpPr>
@@ -25825,6 +25941,10 @@
             <a:prstDash val="solid"/>
           </a:ln>
         </p:spPr>
+        <p:txBody>
+          <a:bodyPr/>
+          <a:p/>
+        </p:txBody>
       </p:sp>
       <p:sp>
         <p:nvSpPr>
@@ -25979,6 +26099,10 @@
             <a:prstDash val="solid"/>
           </a:ln>
         </p:spPr>
+        <p:txBody>
+          <a:bodyPr/>
+          <a:p/>
+        </p:txBody>
       </p:sp>
       <p:sp>
         <p:nvSpPr>
@@ -26080,6 +26204,10 @@
             <a:prstDash val="solid"/>
           </a:ln>
         </p:spPr>
+        <p:txBody>
+          <a:bodyPr/>
+          <a:p/>
+        </p:txBody>
       </p:sp>
       <p:sp>
         <p:nvSpPr>
@@ -26240,6 +26368,10 @@
             <a:prstDash val="solid"/>
           </a:ln>
         </p:spPr>
+        <p:txBody>
+          <a:bodyPr/>
+          <a:p/>
+        </p:txBody>
       </p:sp>
       <p:sp>
         <p:nvSpPr>
@@ -26394,6 +26526,10 @@
             <a:prstDash val="solid"/>
           </a:ln>
         </p:spPr>
+        <p:txBody>
+          <a:bodyPr/>
+          <a:p/>
+        </p:txBody>
       </p:sp>
       <p:sp>
         <p:nvSpPr>
@@ -26495,6 +26631,10 @@
             <a:prstDash val="solid"/>
           </a:ln>
         </p:spPr>
+        <p:txBody>
+          <a:bodyPr/>
+          <a:p/>
+        </p:txBody>
       </p:sp>
       <p:sp>
         <p:nvSpPr>
@@ -26655,6 +26795,10 @@
             <a:prstDash val="solid"/>
           </a:ln>
         </p:spPr>
+        <p:txBody>
+          <a:bodyPr/>
+          <a:p/>
+        </p:txBody>
       </p:sp>
       <p:sp>
         <p:nvSpPr>
